--- a/public/fun/pack/pptx/birthdaypro/돌잔치프리미엄_47_돌잡이중심_다크로즈골드.pptx
+++ b/public/fun/pack/pptx/birthdaypro/돌잔치프리미엄_47_돌잡이중심_다크로즈골드.pptx
@@ -112,12 +112,12 @@
   <p:extLst>
     <p:ext uri="{521415D9-36F7-43E2-AB2F-B90AF26B5E84}">
       <p14:sectionLst xmlns:p14="http://schemas.microsoft.com/office/powerpoint/2010/main">
-        <p14:section name="시작" id="{263D457F-C86B-4B6D-A166-29D9F3594E06}">
+        <p14:section name="시작" id="{9FBFC737-88BA-4398-BDD9-36A09B691B06}">
           <p14:sldIdLst>
             <p14:sldId id="256"/>
           </p14:sldIdLst>
         </p14:section>
-        <p14:section name="본문" id="{1B5FB5CD-BE15-4CDD-9791-4949A3A72754}">
+        <p14:section name="본문" id="{B540B77B-5C06-4DDF-8404-9BB910087BFC}">
           <p14:sldIdLst>
             <p14:sldId id="257"/>
             <p14:sldId id="258"/>
@@ -125,7 +125,7 @@
             <p14:sldId id="260"/>
           </p14:sldIdLst>
         </p14:section>
-        <p14:section name="마무리" id="{741D3C4D-DBD0-4013-901D-FEDB149D13ED}">
+        <p14:section name="마무리" id="{7BA5B77F-AB35-463E-A668-BF2D60B1D582}">
           <p14:sldIdLst>
             <p14:sldId id="261"/>
           </p14:sldIdLst>
@@ -1468,7 +1468,7 @@
             </a:lvl1pPr>
           </a:lstStyle>
           <a:p>
-            <a:fld id="{64AEEB54-52EB-4AB2-8758-7BADD6822C70}" type="slidenum">
+            <a:fld id="{B7F7238B-EB0A-4742-88BA-C740B01C30D5}" type="slidenum">
               <a:rPr lang="en-US"/>
               <a:t>‹#›</a:t>
             </a:fld>
@@ -2068,7 +2068,7 @@
             </a:lvl1pPr>
           </a:lstStyle>
           <a:p>
-            <a:fld id="{7330D6C9-0A39-4B82-8AF6-320054EF211A}" type="slidenum">
+            <a:fld id="{D7656A07-7042-4B1C-B285-C39932D94DE9}" type="slidenum">
               <a:rPr lang="en-US"/>
               <a:t>‹#›</a:t>
             </a:fld>
@@ -2665,7 +2665,7 @@
             </a:lvl1pPr>
           </a:lstStyle>
           <a:p>
-            <a:fld id="{5FF233F2-99B5-482F-8E20-8FABA4A2E2D5}" type="slidenum">
+            <a:fld id="{014CD3C1-C8C2-4EEC-BE7A-8BF67F8853A9}" type="slidenum">
               <a:rPr lang="en-US"/>
               <a:t>‹#›</a:t>
             </a:fld>
@@ -3468,7 +3468,7 @@
           <a:p>
             <a:r>
               <a:rPr lang="ko-KR"/>
-              <a:t>아기 이름 · 0000. 00. 00</a:t>
+              <a:t>아기 이름 · 날짜 입력</a:t>
             </a:r>
           </a:p>
           <a:p>
@@ -3628,7 +3628,7 @@
           <a:bodyPr/>
           <a:lstStyle/>
           <a:p>
-            <a:fld id="{0800A866-715A-4399-B809-3432EDF82DDF}" type="slidenum">
+            <a:fld id="{263B83B2-1952-4292-B650-C5362EBD3705}" type="slidenum">
               <a:rPr lang="en-US"/>
               <a:t>‹#›</a:t>
             </a:fld>
@@ -4228,7 +4228,7 @@
           <a:bodyPr/>
           <a:lstStyle/>
           <a:p>
-            <a:fld id="{0B9F3B06-4A56-470C-9943-98C0843C7E50}" type="slidenum">
+            <a:fld id="{3D722F17-254D-4F39-BA1F-6AAC0EE2D0DD}" type="slidenum">
               <a:rPr lang="en-US"/>
               <a:t>‹#›</a:t>
             </a:fld>
@@ -5491,7 +5491,7 @@
           <a:bodyPr/>
           <a:lstStyle/>
           <a:p>
-            <a:fld id="{FE44C6A9-A386-4260-8779-7A9937A5E07B}" type="slidenum">
+            <a:fld id="{818A0A6A-3E37-442B-BD82-B6F93A02280F}" type="slidenum">
               <a:rPr lang="en-US"/>
               <a:t>‹#›</a:t>
             </a:fld>
@@ -6262,7 +6262,7 @@
           <a:bodyPr/>
           <a:lstStyle/>
           <a:p>
-            <a:fld id="{A5879B60-0A09-470E-AA0E-822ED7B5F797}" type="slidenum">
+            <a:fld id="{8205FD16-7E8D-4D2B-A15B-F4DC57A090A6}" type="slidenum">
               <a:rPr lang="en-US"/>
               <a:t>‹#›</a:t>
             </a:fld>
